--- a/report/slides/计算机视觉期中实验汇报_民族服饰数据集构建.pptx
+++ b/report/slides/计算机视觉期中实验汇报_民族服饰数据集构建.pptx
@@ -3206,7 +3206,7 @@
               </a:defRPr>
             </a:pPr>
             <a:r>
-              <a:t>汇报人：邹弘辉 (组长)  |  学号：20241120335  |  指导教师：朱锐</a:t>
+              <a:t>汇报人：邹弘辉 (组长)  |  学号：20241120335  |  指导教师：黄珊珊</a:t>
             </a:r>
             <a:br/>
             <a:r>

--- a/report/slides/计算机视觉期中实验汇报_民族服饰数据集构建.pptx
+++ b/report/slides/计算机视觉期中实验汇报_民族服饰数据集构建.pptx
@@ -3190,7 +3190,7 @@
               </a:defRPr>
             </a:pPr>
             <a:r>
-              <a:t>Yunnan Ethnic Clothing Image Dataset (YECID-1584) · 期中实验答辩汇报</a:t>
+              <a:t>Yunnan Ethnic Clothing Image Dataset (YECID-1542) · 期中实验答辩汇报</a:t>
             </a:r>
           </a:p>
           <a:p>
@@ -3737,7 +3737,7 @@
         <p:spPr>
           <a:xfrm>
             <a:off x="731520" y="1371600"/>
-            <a:ext cx="5669280" cy="3149600"/>
+            <a:ext cx="5669280" cy="3103185"/>
           </a:xfrm>
           <a:prstGeom prst="rect">
             <a:avLst/>
@@ -3949,7 +3949,7 @@
               </a:defRPr>
             </a:pPr>
             <a:r>
-              <a:t>   双图严格 VLM 裁判预检 + 两轮双盲人工终审，锁定 1,584 纯金样本，全自动提取 captions.jsonl。</a:t>
+              <a:t>   双图严格 VLM 裁判预检 + 两轮双盲人工终审，锁定 1,542 纯金样本，全自动提取 captions.jsonl。</a:t>
             </a:r>
           </a:p>
         </p:txBody>
@@ -5324,7 +5324,7 @@
               </a:defRPr>
             </a:pPr>
             <a:r>
-              <a:t>六、 数据集统计分布与分层划分质量 (YECID-1584)</a:t>
+              <a:t>六、 数据集统计分布与分层划分质量 (YECID-1542)</a:t>
             </a:r>
           </a:p>
         </p:txBody>
@@ -5382,7 +5382,7 @@
         <p:spPr>
           <a:xfrm>
             <a:off x="731520" y="1371600"/>
-            <a:ext cx="5669280" cy="2834640"/>
+            <a:ext cx="5669280" cy="2807643"/>
           </a:xfrm>
           <a:prstGeom prst="rect">
             <a:avLst/>
@@ -5461,7 +5461,7 @@
               </a:defRPr>
             </a:pPr>
             <a:r>
-              <a:t>• 样本总体规模：1,584 组配对样本（超额满足任务书 ≥ 1,500 组要求）；</a:t>
+              <a:t>• 样本总体规模：1,542 组配对样本（超额满足任务书 ≥ 1,500 组要求）；</a:t>
             </a:r>
           </a:p>
           <a:p>
@@ -5518,45 +5518,45 @@
               </a:defRPr>
             </a:pPr>
             <a:r>
-              <a:t>   - 训练集 (Train): 1,108 张 (69.9%)</a:t>
-            </a:r>
-          </a:p>
-          <a:p>
-            <a:pPr>
-              <a:lnSpc>
-                <a:spcPct val="120000"/>
-              </a:lnSpc>
-              <a:spcAft>
-                <a:spcPts val="400"/>
-              </a:spcAft>
-              <a:defRPr sz="1100">
-                <a:solidFill>
-                  <a:srgbClr val="212121"/>
-                </a:solidFill>
-                <a:latin typeface="Microsoft YaHei"/>
-              </a:defRPr>
-            </a:pPr>
-            <a:r>
-              <a:t>   - 验证集 (Val): 238 张 (15.0%)</a:t>
-            </a:r>
-          </a:p>
-          <a:p>
-            <a:pPr>
-              <a:lnSpc>
-                <a:spcPct val="120000"/>
-              </a:lnSpc>
-              <a:spcAft>
-                <a:spcPts val="400"/>
-              </a:spcAft>
-              <a:defRPr sz="1100">
-                <a:solidFill>
-                  <a:srgbClr val="212121"/>
-                </a:solidFill>
-                <a:latin typeface="Microsoft YaHei"/>
-              </a:defRPr>
-            </a:pPr>
-            <a:r>
-              <a:t>   - 测试集 (Test): 238 张 (15.0%)</a:t>
+              <a:t>   - 训练集 (Train): 1,079 张 (69.9%)</a:t>
+            </a:r>
+          </a:p>
+          <a:p>
+            <a:pPr>
+              <a:lnSpc>
+                <a:spcPct val="120000"/>
+              </a:lnSpc>
+              <a:spcAft>
+                <a:spcPts val="400"/>
+              </a:spcAft>
+              <a:defRPr sz="1100">
+                <a:solidFill>
+                  <a:srgbClr val="212121"/>
+                </a:solidFill>
+                <a:latin typeface="Microsoft YaHei"/>
+              </a:defRPr>
+            </a:pPr>
+            <a:r>
+              <a:t>   - 验证集 (Val): 232 张 (15.0%)</a:t>
+            </a:r>
+          </a:p>
+          <a:p>
+            <a:pPr>
+              <a:lnSpc>
+                <a:spcPct val="120000"/>
+              </a:lnSpc>
+              <a:spcAft>
+                <a:spcPts val="400"/>
+              </a:spcAft>
+              <a:defRPr sz="1100">
+                <a:solidFill>
+                  <a:srgbClr val="212121"/>
+                </a:solidFill>
+                <a:latin typeface="Microsoft YaHei"/>
+              </a:defRPr>
+            </a:pPr>
+            <a:r>
+              <a:t>   - 测试集 (Test): 232 张 (15.0%)</a:t>
             </a:r>
           </a:p>
           <a:p>

--- a/report/slides/计算机视觉期中实验汇报_民族服饰数据集构建.pptx
+++ b/report/slides/计算机视觉期中实验汇报_民族服饰数据集构建.pptx
@@ -3190,7 +3190,7 @@
               </a:defRPr>
             </a:pPr>
             <a:r>
-              <a:t>Yunnan Ethnic Clothing Image Dataset (YECID-1542) · 期中实验答辩汇报</a:t>
+              <a:t>Yunnan Ethnic Clothing Image Dataset (YECID-1521) · 期中实验答辩汇报</a:t>
             </a:r>
           </a:p>
           <a:p>
@@ -3949,7 +3949,7 @@
               </a:defRPr>
             </a:pPr>
             <a:r>
-              <a:t>   双图严格 VLM 裁判预检 + 两轮双盲人工终审，锁定 1,542 纯金样本，全自动提取 captions.jsonl。</a:t>
+              <a:t>   双图严格 VLM 裁判预检 + 两轮双盲人工终审，锁定 1,521 纯金样本，全自动提取 captions.jsonl。</a:t>
             </a:r>
           </a:p>
         </p:txBody>
@@ -5324,7 +5324,7 @@
               </a:defRPr>
             </a:pPr>
             <a:r>
-              <a:t>六、 数据集统计分布与分层划分质量 (YECID-1542)</a:t>
+              <a:t>六、 数据集统计分布与分层划分质量 (YECID-1521)</a:t>
             </a:r>
           </a:p>
         </p:txBody>
@@ -5461,7 +5461,7 @@
               </a:defRPr>
             </a:pPr>
             <a:r>
-              <a:t>• 样本总体规模：1,542 组配对样本（超额满足任务书 ≥ 1,500 组要求）；</a:t>
+              <a:t>• 样本总体规模：1,521 组配对样本（超额满足任务书 ≥ 1,500 组要求）；</a:t>
             </a:r>
           </a:p>
           <a:p>
@@ -5518,45 +5518,45 @@
               </a:defRPr>
             </a:pPr>
             <a:r>
-              <a:t>   - 训练集 (Train): 1,079 张 (69.9%)</a:t>
-            </a:r>
-          </a:p>
-          <a:p>
-            <a:pPr>
-              <a:lnSpc>
-                <a:spcPct val="120000"/>
-              </a:lnSpc>
-              <a:spcAft>
-                <a:spcPts val="400"/>
-              </a:spcAft>
-              <a:defRPr sz="1100">
-                <a:solidFill>
-                  <a:srgbClr val="212121"/>
-                </a:solidFill>
-                <a:latin typeface="Microsoft YaHei"/>
-              </a:defRPr>
-            </a:pPr>
-            <a:r>
-              <a:t>   - 验证集 (Val): 232 张 (15.0%)</a:t>
-            </a:r>
-          </a:p>
-          <a:p>
-            <a:pPr>
-              <a:lnSpc>
-                <a:spcPct val="120000"/>
-              </a:lnSpc>
-              <a:spcAft>
-                <a:spcPts val="400"/>
-              </a:spcAft>
-              <a:defRPr sz="1100">
-                <a:solidFill>
-                  <a:srgbClr val="212121"/>
-                </a:solidFill>
-                <a:latin typeface="Microsoft YaHei"/>
-              </a:defRPr>
-            </a:pPr>
-            <a:r>
-              <a:t>   - 测试集 (Test): 232 张 (15.0%)</a:t>
+              <a:t>   - 训练集 (Train): 1,068 张 (69.9%)</a:t>
+            </a:r>
+          </a:p>
+          <a:p>
+            <a:pPr>
+              <a:lnSpc>
+                <a:spcPct val="120000"/>
+              </a:lnSpc>
+              <a:spcAft>
+                <a:spcPts val="400"/>
+              </a:spcAft>
+              <a:defRPr sz="1100">
+                <a:solidFill>
+                  <a:srgbClr val="212121"/>
+                </a:solidFill>
+                <a:latin typeface="Microsoft YaHei"/>
+              </a:defRPr>
+            </a:pPr>
+            <a:r>
+              <a:t>   - 验证集 (Val): 225 张 (15.0%)</a:t>
+            </a:r>
+          </a:p>
+          <a:p>
+            <a:pPr>
+              <a:lnSpc>
+                <a:spcPct val="120000"/>
+              </a:lnSpc>
+              <a:spcAft>
+                <a:spcPts val="400"/>
+              </a:spcAft>
+              <a:defRPr sz="1100">
+                <a:solidFill>
+                  <a:srgbClr val="212121"/>
+                </a:solidFill>
+                <a:latin typeface="Microsoft YaHei"/>
+              </a:defRPr>
+            </a:pPr>
+            <a:r>
+              <a:t>   - 测试集 (Test): 225 张 (15.0%)</a:t>
             </a:r>
           </a:p>
           <a:p>
